--- a/PredictionBot_Presentation.pptx
+++ b/PredictionBot_Presentation.pptx
@@ -8235,7 +8235,7 @@
             </a:r>
             <a:br/>
             <a:r>
-              <a:t>Runs FastAPI on port 8000 with 32+ REST endpoints</a:t>
+              <a:t>Runs FastAPI on port 8000 with 40+ REST endpoints</a:t>
             </a:r>
             <a:br/>
             <a:r>
@@ -9527,7 +9527,7 @@
             </a:r>
             <a:br/>
             <a:r>
-              <a:t>CSV export &amp; trade notes</a:t>
+              <a:t>CSV export, toast notifications, keyboard shortcuts</a:t>
             </a:r>
           </a:p>
         </p:txBody>
@@ -10085,7 +10085,7 @@
               </a:defRPr>
             </a:pPr>
             <a:r>
-              <a:t>  FastAPI (32+ REST endpoints)</a:t>
+              <a:t>  FastAPI (40+ REST endpoints)</a:t>
             </a:r>
           </a:p>
         </p:txBody>
@@ -12943,7 +12943,7 @@
               </a:defRPr>
             </a:pPr>
             <a:r>
-              <a:t>Scan Summary</a:t>
+              <a:t>Top 3 Opportunities + Scan Summary</a:t>
             </a:r>
           </a:p>
         </p:txBody>
@@ -12979,7 +12979,7 @@
               </a:defRPr>
             </a:pPr>
             <a:r>
-              <a:t>Quick-scan button triggers RF market scan. Shows count of signals found, last scan timestamp, and entry/exit signal summary.</a:t>
+              <a:t>Top 3 market opportunities with earning potential calculator ($10-$500 bet selector). Auto-refreshes every 30s. Last-updated timestamp shows data freshness. Scan summary with signal counts.</a:t>
             </a:r>
           </a:p>
         </p:txBody>
@@ -15178,7 +15178,7 @@
               </a:defRPr>
             </a:pPr>
             <a:r>
-              <a:t>Browse and analyze Kalshi markets</a:t>
+              <a:t>Search, sort, filter, and analyze Kalshi markets</a:t>
             </a:r>
           </a:p>
         </p:txBody>
@@ -15260,7 +15260,7 @@
               </a:defRPr>
             </a:pPr>
             <a:r>
-              <a:t>MARKETS TABLE</a:t>
+              <a:t>MARKETS TABLE (with search, sort by 6 criteria, status filter pills)</a:t>
             </a:r>
           </a:p>
         </p:txBody>
@@ -17401,7 +17401,7 @@
             </a:r>
             <a:br/>
             <a:r>
-              <a:t>Editable notes per trade  |  CSV export  |  Sharpe Ratio Guide (&lt; 1 poor, 1-2 good, &gt; 2 excellent)</a:t>
+              <a:t>Editable notes per trade  |  CSV export (live + paper)  |  Sharpe Ratio Guide (&lt; 1 poor, 1-2 good, &gt; 2 excellent)</a:t>
             </a:r>
           </a:p>
         </p:txBody>

--- a/PredictionBot_Presentation.pptx
+++ b/PredictionBot_Presentation.pptx
@@ -5245,7 +5245,7 @@
               </a:defRPr>
             </a:pPr>
             <a:r>
-              <a:t>Auto-Scan toggle (paper trading loop) + Auto-Trade toggle (live Kalshi orders). Configurable scan interval. Scan result log.</a:t>
+              <a:t>Auto-Scan toggle (paper trading loop) + Auto-Trade toggle with inline confirmation (live Kalshi orders). Configurable scan interval. Scan result log.</a:t>
             </a:r>
           </a:p>
         </p:txBody>
@@ -9527,7 +9527,7 @@
             </a:r>
             <a:br/>
             <a:r>
-              <a:t>CSV export, toast notifications, keyboard shortcuts</a:t>
+              <a:t>CSV export, toast notifications, keyboard shortcuts, accessibility labels, loading skeletons, inline confirmations</a:t>
             </a:r>
           </a:p>
         </p:txBody>
@@ -10193,7 +10193,7 @@
               </a:defRPr>
             </a:pPr>
             <a:r>
-              <a:t>  Pydantic config + risk manager</a:t>
+              <a:t>  Pydantic validation + risk manager</a:t>
             </a:r>
           </a:p>
         </p:txBody>
